--- a/retrieval-cops-and-robbers-template.pptx
+++ b/retrieval-cops-and-robbers-template.pptx
@@ -2,13 +2,13 @@
 <file path=ppt/presentation.xml><?xml version="1.0" encoding="utf-8"?>
 <p:presentation xmlns:p="http://schemas.openxmlformats.org/presentationml/2006/main">
   <p:sldMasterIdLst>
-    <p:sldMasterId xmlns:r="http://schemas.openxmlformats.org/officeDocument/2006/relationships" id="2147483648" r:id="Ra3b56c5049a1443d"/>
+    <p:sldMasterId xmlns:r="http://schemas.openxmlformats.org/officeDocument/2006/relationships" id="2147483648" r:id="R7add7701e8d94d3c"/>
   </p:sldMasterIdLst>
   <p:notesMasterIdLst>
-    <p:notesMasterId xmlns:r="http://schemas.openxmlformats.org/officeDocument/2006/relationships" r:id="R3ea3ed2e07b14d2e"/>
+    <p:notesMasterId xmlns:r="http://schemas.openxmlformats.org/officeDocument/2006/relationships" r:id="Rcb334c57399447ea"/>
   </p:notesMasterIdLst>
   <p:sldIdLst>
-    <p:sldId xmlns:r="http://schemas.openxmlformats.org/officeDocument/2006/relationships" id="256" r:id="R726842be85274e68"/>
+    <p:sldId xmlns:r="http://schemas.openxmlformats.org/officeDocument/2006/relationships" id="256" r:id="R1e54f7bc6b684ac8"/>
   </p:sldIdLst>
   <p:sldSz cx="12192000" cy="6858000"/>
   <p:notesSz cx="6858000" cy="9144000"/>
@@ -442,62 +442,7 @@
           <a:lstStyle xmlns:a="http://schemas.openxmlformats.org/drawingml/2006/main"/>
           <a:p xmlns:a="http://schemas.openxmlformats.org/drawingml/2006/main">
             <a:r>
-              <a:t>Teacher setup: Replace bracketed text before teaching. All text and shapes are editable. Duplicate the slide for answers or another prompt. For card activities, separate prompt and answer sides before printing.</a:t>
-            </a:r>
-          </a:p>
-          <a:p xmlns:a="http://schemas.openxmlformats.org/drawingml/2006/main">
-            <a:r>
-              <a:t/>
-            </a:r>
-          </a:p>
-          <a:p xmlns:a="http://schemas.openxmlformats.org/drawingml/2006/main">
-            <a:r>
-              <a:t>Materials: Paper split into “My recall” and “From peers”</a:t>
-            </a:r>
-          </a:p>
-          <a:p xmlns:a="http://schemas.openxmlformats.org/drawingml/2006/main">
-            <a:r>
-              <a:t>Suggested time including feedback: 8 minutes.</a:t>
-            </a:r>
-          </a:p>
-          <a:p xmlns:a="http://schemas.openxmlformats.org/drawingml/2006/main">
-            <a:r>
-              <a:t/>
-            </a:r>
-          </a:p>
-          <a:p xmlns:a="http://schemas.openxmlformats.org/drawingml/2006/main">
-            <a:r>
-              <a:t>1. Recall alone: Write remembered knowledge in the first column, with notes closed.</a:t>
-            </a:r>
-          </a:p>
-          <a:p xmlns:a="http://schemas.openxmlformats.org/drawingml/2006/main">
-            <a:r>
-              <a:t>2. Compare: Read a partner’s recall and identify something you missed.</a:t>
-            </a:r>
-          </a:p>
-          <a:p xmlns:a="http://schemas.openxmlformats.org/drawingml/2006/main">
-            <a:r>
-              <a:t>3. Add separately: Put new ideas in the second column to distinguish your recall from borrowed knowledge.</a:t>
-            </a:r>
-          </a:p>
-          <a:p xmlns:a="http://schemas.openxmlformats.org/drawingml/2006/main">
-            <a:r>
-              <a:t>4. Verify and retrieve: Check accuracy, then cover both columns and recall a new idea.</a:t>
-            </a:r>
-          </a:p>
-          <a:p xmlns:a="http://schemas.openxmlformats.org/drawingml/2006/main">
-            <a:r>
-              <a:t/>
-            </a:r>
-          </a:p>
-          <a:p xmlns:a="http://schemas.openxmlformats.org/drawingml/2006/main">
-            <a:r>
-              <a:t>Check: Peer additions are feedback, not independent retrieval. Verify them before the final recall.</a:t>
-            </a:r>
-          </a:p>
-          <a:p xmlns:a="http://schemas.openxmlformats.org/drawingml/2006/main">
-            <a:r>
-              <a:t>Adapt: Use fixed pairs instead of movement, and headings to support a narrower focus.</a:t>
+              <a:t>Replace bracketed text with your own taught prompts and checked answers. All labels and response areas are editable. Give everyone an independent attempt before revealing answers. Duplicate the slide for answers or another prompt. For cards, print the prompt and answer on opposite sides or fold them to keep answers hidden.</a:t>
             </a:r>
           </a:p>
         </p:txBody>
@@ -544,7 +489,7 @@
           <p:cNvPr id="4" name="Accent rule">
             <a:extLst xmlns:a="http://schemas.openxmlformats.org/drawingml/2006/main">
               <a:ext uri="{FF2B5EF4-FFF2-40B4-BE49-F238E27FC236}">
-                <a16:creationId xmlns:a16="http://schemas.microsoft.com/office/drawing/2014/main" id="{5D095150-8588-43A9-B175-1EEC5BC0ED7D}"/>
+                <a16:creationId xmlns:a16="http://schemas.microsoft.com/office/drawing/2014/main" id="{CB491F24-A2EC-462D-81FB-CA919F397692}"/>
               </a:ext>
             </a:extLst>
           </p:cNvPr>
@@ -575,7 +520,7 @@
           <p:cNvPr id="2" name="Title">
             <a:extLst xmlns:a="http://schemas.openxmlformats.org/drawingml/2006/main">
               <a:ext uri="{FF2B5EF4-FFF2-40B4-BE49-F238E27FC236}">
-                <a16:creationId xmlns:a16="http://schemas.microsoft.com/office/drawing/2014/main" id="{3D266528-AFF5-40EF-939A-582193697233}"/>
+                <a16:creationId xmlns:a16="http://schemas.microsoft.com/office/drawing/2014/main" id="{FE62712F-CC04-4642-850F-E66B139CFDB9}"/>
               </a:ext>
             </a:extLst>
           </p:cNvPr>
@@ -722,7 +667,7 @@
           <p:cNvPr id="3" name="Subtitle">
             <a:extLst xmlns:a="http://schemas.openxmlformats.org/drawingml/2006/main">
               <a:ext uri="{FF2B5EF4-FFF2-40B4-BE49-F238E27FC236}">
-                <a16:creationId xmlns:a16="http://schemas.microsoft.com/office/drawing/2014/main" id="{6A2ED4E5-5563-41AA-A925-50A65E6EC27A}"/>
+                <a16:creationId xmlns:a16="http://schemas.microsoft.com/office/drawing/2014/main" id="{04AD6DDB-D1AF-4467-B2A8-F5F92922BBCD}"/>
               </a:ext>
             </a:extLst>
           </p:cNvPr>
@@ -886,7 +831,7 @@
           <p:cNvPr id="3" name="Accent rule">
             <a:extLst xmlns:a="http://schemas.openxmlformats.org/drawingml/2006/main">
               <a:ext uri="{FF2B5EF4-FFF2-40B4-BE49-F238E27FC236}">
-                <a16:creationId xmlns:a16="http://schemas.microsoft.com/office/drawing/2014/main" id="{C5A25322-23CF-4029-A93E-0713096490C8}"/>
+                <a16:creationId xmlns:a16="http://schemas.microsoft.com/office/drawing/2014/main" id="{DE5C5AD0-8B7E-402B-BDA2-2F42D8973817}"/>
               </a:ext>
             </a:extLst>
           </p:cNvPr>
@@ -917,7 +862,7 @@
           <p:cNvPr id="2" name="Section title">
             <a:extLst xmlns:a="http://schemas.openxmlformats.org/drawingml/2006/main">
               <a:ext uri="{FF2B5EF4-FFF2-40B4-BE49-F238E27FC236}">
-                <a16:creationId xmlns:a16="http://schemas.microsoft.com/office/drawing/2014/main" id="{0D4766D4-1A35-4A9D-ADBA-7E6E0F2A2F97}"/>
+                <a16:creationId xmlns:a16="http://schemas.microsoft.com/office/drawing/2014/main" id="{BC51B4C5-C535-41D6-8E1F-36F11EF95945}"/>
               </a:ext>
             </a:extLst>
           </p:cNvPr>
@@ -1081,7 +1026,7 @@
           <p:cNvPr id="4" name="Accent rule">
             <a:extLst xmlns:a="http://schemas.openxmlformats.org/drawingml/2006/main">
               <a:ext uri="{FF2B5EF4-FFF2-40B4-BE49-F238E27FC236}">
-                <a16:creationId xmlns:a16="http://schemas.microsoft.com/office/drawing/2014/main" id="{CB03CD68-C95E-4464-BAB2-540923DBBE82}"/>
+                <a16:creationId xmlns:a16="http://schemas.microsoft.com/office/drawing/2014/main" id="{23E8E1B9-3C0D-4DAA-9B05-FCDCA30373BC}"/>
               </a:ext>
             </a:extLst>
           </p:cNvPr>
@@ -1112,7 +1057,7 @@
           <p:cNvPr id="2" name="Title">
             <a:extLst xmlns:a="http://schemas.openxmlformats.org/drawingml/2006/main">
               <a:ext uri="{FF2B5EF4-FFF2-40B4-BE49-F238E27FC236}">
-                <a16:creationId xmlns:a16="http://schemas.microsoft.com/office/drawing/2014/main" id="{1D35ED26-71F3-40CE-BAD5-6488DBE7EB84}"/>
+                <a16:creationId xmlns:a16="http://schemas.microsoft.com/office/drawing/2014/main" id="{11E9B894-CF39-4074-9127-F5053B0C87D9}"/>
               </a:ext>
             </a:extLst>
           </p:cNvPr>
@@ -1259,7 +1204,7 @@
           <p:cNvPr id="3" name="Body">
             <a:extLst xmlns:a="http://schemas.openxmlformats.org/drawingml/2006/main">
               <a:ext uri="{FF2B5EF4-FFF2-40B4-BE49-F238E27FC236}">
-                <a16:creationId xmlns:a16="http://schemas.microsoft.com/office/drawing/2014/main" id="{B9485D96-0DAF-40F9-8505-C4AC0DB1933A}"/>
+                <a16:creationId xmlns:a16="http://schemas.microsoft.com/office/drawing/2014/main" id="{94ACF7AF-ECCF-45C5-A767-81C4E0969A1C}"/>
               </a:ext>
             </a:extLst>
           </p:cNvPr>
@@ -1423,7 +1368,7 @@
           <p:cNvPr id="5" name="Accent rule">
             <a:extLst xmlns:a="http://schemas.openxmlformats.org/drawingml/2006/main">
               <a:ext uri="{FF2B5EF4-FFF2-40B4-BE49-F238E27FC236}">
-                <a16:creationId xmlns:a16="http://schemas.microsoft.com/office/drawing/2014/main" id="{7F0E52F1-4C5C-4FA5-9F08-47BF2D0618DB}"/>
+                <a16:creationId xmlns:a16="http://schemas.microsoft.com/office/drawing/2014/main" id="{F4553481-8F44-4203-A61C-3C42F40CA5CD}"/>
               </a:ext>
             </a:extLst>
           </p:cNvPr>
@@ -1454,7 +1399,7 @@
           <p:cNvPr id="2" name="Title">
             <a:extLst xmlns:a="http://schemas.openxmlformats.org/drawingml/2006/main">
               <a:ext uri="{FF2B5EF4-FFF2-40B4-BE49-F238E27FC236}">
-                <a16:creationId xmlns:a16="http://schemas.microsoft.com/office/drawing/2014/main" id="{3879A532-9169-4ECB-A30E-B870B7487B2F}"/>
+                <a16:creationId xmlns:a16="http://schemas.microsoft.com/office/drawing/2014/main" id="{D2B8CD16-3A9B-424F-AE01-81725D39084B}"/>
               </a:ext>
             </a:extLst>
           </p:cNvPr>
@@ -1601,7 +1546,7 @@
           <p:cNvPr id="3" name="Left column">
             <a:extLst xmlns:a="http://schemas.openxmlformats.org/drawingml/2006/main">
               <a:ext uri="{FF2B5EF4-FFF2-40B4-BE49-F238E27FC236}">
-                <a16:creationId xmlns:a16="http://schemas.microsoft.com/office/drawing/2014/main" id="{D307C048-7DB8-4B47-8D58-5CA30642D458}"/>
+                <a16:creationId xmlns:a16="http://schemas.microsoft.com/office/drawing/2014/main" id="{ADE6855F-60E7-4C90-9326-2553817219DF}"/>
               </a:ext>
             </a:extLst>
           </p:cNvPr>
@@ -1748,7 +1693,7 @@
           <p:cNvPr id="4" name="Right column">
             <a:extLst xmlns:a="http://schemas.openxmlformats.org/drawingml/2006/main">
               <a:ext uri="{FF2B5EF4-FFF2-40B4-BE49-F238E27FC236}">
-                <a16:creationId xmlns:a16="http://schemas.microsoft.com/office/drawing/2014/main" id="{1AF6ECFE-D2B8-4F4B-950C-F736B1E6F645}"/>
+                <a16:creationId xmlns:a16="http://schemas.microsoft.com/office/drawing/2014/main" id="{D1368D29-FCF1-4BAE-BC10-3E74FA8FB2B7}"/>
               </a:ext>
             </a:extLst>
           </p:cNvPr>
@@ -1912,7 +1857,7 @@
           <p:cNvPr id="4" name="Accent rule">
             <a:extLst xmlns:a="http://schemas.openxmlformats.org/drawingml/2006/main">
               <a:ext uri="{FF2B5EF4-FFF2-40B4-BE49-F238E27FC236}">
-                <a16:creationId xmlns:a16="http://schemas.microsoft.com/office/drawing/2014/main" id="{1FA587A7-8C55-4C11-91D5-A4F12FE92508}"/>
+                <a16:creationId xmlns:a16="http://schemas.microsoft.com/office/drawing/2014/main" id="{729A7CA0-1A25-42CE-A11F-5ACEA1DAB230}"/>
               </a:ext>
             </a:extLst>
           </p:cNvPr>
@@ -1943,7 +1888,7 @@
           <p:cNvPr id="2" name="Title">
             <a:extLst xmlns:a="http://schemas.openxmlformats.org/drawingml/2006/main">
               <a:ext uri="{FF2B5EF4-FFF2-40B4-BE49-F238E27FC236}">
-                <a16:creationId xmlns:a16="http://schemas.microsoft.com/office/drawing/2014/main" id="{DC2FB292-1982-4412-B515-FC2F55A90549}"/>
+                <a16:creationId xmlns:a16="http://schemas.microsoft.com/office/drawing/2014/main" id="{1C3ECC34-45C0-490D-BE0C-F963C7EFE122}"/>
               </a:ext>
             </a:extLst>
           </p:cNvPr>
@@ -2090,7 +2035,7 @@
           <p:cNvPr id="3" name="Left column">
             <a:extLst xmlns:a="http://schemas.openxmlformats.org/drawingml/2006/main">
               <a:ext uri="{FF2B5EF4-FFF2-40B4-BE49-F238E27FC236}">
-                <a16:creationId xmlns:a16="http://schemas.microsoft.com/office/drawing/2014/main" id="{4E510BB5-6E20-4595-802D-803AA79E18BF}"/>
+                <a16:creationId xmlns:a16="http://schemas.microsoft.com/office/drawing/2014/main" id="{197C33C7-9CFC-45D4-9F8E-D3A22D2F6553}"/>
               </a:ext>
             </a:extLst>
           </p:cNvPr>
@@ -2275,12 +2220,12 @@
   </p:cSld>
   <p:clrMap bg1="lt1" tx1="dk1" bg2="lt2" tx2="dk2" accent1="accent1" accent2="accent2" accent3="accent3" accent4="accent4" accent5="accent5" accent6="accent6" hlink="hlink" folHlink="folHlink"/>
   <p:sldLayoutIdLst>
-    <p:sldLayoutId xmlns:r="http://schemas.openxmlformats.org/officeDocument/2006/relationships" id="2147483649" r:id="Rc8080f5f1b1740ed"/>
-    <p:sldLayoutId xmlns:r="http://schemas.openxmlformats.org/officeDocument/2006/relationships" id="2147483650" r:id="R4cec55f819644d6e"/>
-    <p:sldLayoutId xmlns:r="http://schemas.openxmlformats.org/officeDocument/2006/relationships" id="2147483651" r:id="R95724c545ba14b53"/>
-    <p:sldLayoutId xmlns:r="http://schemas.openxmlformats.org/officeDocument/2006/relationships" id="2147483652" r:id="R0bb85c5a45d845eb"/>
-    <p:sldLayoutId xmlns:r="http://schemas.openxmlformats.org/officeDocument/2006/relationships" id="2147483653" r:id="R7c45d2779e28412f"/>
-    <p:sldLayoutId xmlns:r="http://schemas.openxmlformats.org/officeDocument/2006/relationships" id="2147483654" r:id="R1d0c73e5e1b24c13"/>
+    <p:sldLayoutId xmlns:r="http://schemas.openxmlformats.org/officeDocument/2006/relationships" id="2147483649" r:id="R560071295dfb41e4"/>
+    <p:sldLayoutId xmlns:r="http://schemas.openxmlformats.org/officeDocument/2006/relationships" id="2147483650" r:id="R1fd32a92b90a47a6"/>
+    <p:sldLayoutId xmlns:r="http://schemas.openxmlformats.org/officeDocument/2006/relationships" id="2147483651" r:id="R2154a036785945e5"/>
+    <p:sldLayoutId xmlns:r="http://schemas.openxmlformats.org/officeDocument/2006/relationships" id="2147483652" r:id="R1a25ef83154d4dec"/>
+    <p:sldLayoutId xmlns:r="http://schemas.openxmlformats.org/officeDocument/2006/relationships" id="2147483653" r:id="Rabeecfef74074861"/>
+    <p:sldLayoutId xmlns:r="http://schemas.openxmlformats.org/officeDocument/2006/relationships" id="2147483654" r:id="R6e605c446c74433c"/>
   </p:sldLayoutIdLst>
   <p:txStyles>
     <p:titleStyle>
@@ -2831,7 +2776,7 @@
           <p:cNvPr id="19" name="">
             <a:extLst xmlns:a="http://schemas.openxmlformats.org/drawingml/2006/main">
               <a:ext uri="{FF2B5EF4-FFF2-40B4-BE49-F238E27FC236}">
-                <a16:creationId xmlns:a16="http://schemas.microsoft.com/office/drawing/2014/main" id="{7EEC18E1-15AF-45E7-AB79-C88D7AF13E81}"/>
+                <a16:creationId xmlns:a16="http://schemas.microsoft.com/office/drawing/2014/main" id="{15C0D0A2-F5EB-473C-8969-F735B0054634}"/>
               </a:ext>
             </a:extLst>
           </p:cNvPr>
@@ -2888,7 +2833,7 @@
           <p:cNvPr id="2" name="">
             <a:extLst xmlns:a="http://schemas.openxmlformats.org/drawingml/2006/main">
               <a:ext uri="{FF2B5EF4-FFF2-40B4-BE49-F238E27FC236}">
-                <a16:creationId xmlns:a16="http://schemas.microsoft.com/office/drawing/2014/main" id="{7A6E20FD-D046-40EB-88DE-391BE158994B}"/>
+                <a16:creationId xmlns:a16="http://schemas.microsoft.com/office/drawing/2014/main" id="{61BF7BFF-C671-4976-9D29-BF3FD1B6CA0C}"/>
               </a:ext>
             </a:extLst>
           </p:cNvPr>
@@ -2945,7 +2890,7 @@
           <p:cNvPr id="3" name="">
             <a:extLst xmlns:a="http://schemas.openxmlformats.org/drawingml/2006/main">
               <a:ext uri="{FF2B5EF4-FFF2-40B4-BE49-F238E27FC236}">
-                <a16:creationId xmlns:a16="http://schemas.microsoft.com/office/drawing/2014/main" id="{C80E0647-016A-40FC-830E-83E9D49E9347}"/>
+                <a16:creationId xmlns:a16="http://schemas.microsoft.com/office/drawing/2014/main" id="{BA7D4710-69DD-4A38-8E1D-2D1E37CFE97E}"/>
               </a:ext>
             </a:extLst>
           </p:cNvPr>
@@ -2975,7 +2920,7 @@
           <p:cNvPr id="4" name="">
             <a:extLst xmlns:a="http://schemas.openxmlformats.org/drawingml/2006/main">
               <a:ext uri="{FF2B5EF4-FFF2-40B4-BE49-F238E27FC236}">
-                <a16:creationId xmlns:a16="http://schemas.microsoft.com/office/drawing/2014/main" id="{D15C7C58-49C1-40C4-B2CB-845EA6361753}"/>
+                <a16:creationId xmlns:a16="http://schemas.microsoft.com/office/drawing/2014/main" id="{400E24ED-41D8-4E2D-8BC7-CF91F74EA83C}"/>
               </a:ext>
             </a:extLst>
           </p:cNvPr>
@@ -3032,7 +2977,7 @@
           <p:cNvPr id="5" name="">
             <a:extLst xmlns:a="http://schemas.openxmlformats.org/drawingml/2006/main">
               <a:ext uri="{FF2B5EF4-FFF2-40B4-BE49-F238E27FC236}">
-                <a16:creationId xmlns:a16="http://schemas.microsoft.com/office/drawing/2014/main" id="{93EDED62-6073-4BFB-86DA-5DBBA79FE51C}"/>
+                <a16:creationId xmlns:a16="http://schemas.microsoft.com/office/drawing/2014/main" id="{E1953C12-E8A1-4FC4-8D92-EBA40725EB89}"/>
               </a:ext>
             </a:extLst>
           </p:cNvPr>
@@ -3089,7 +3034,7 @@
           <p:cNvPr id="6" name="">
             <a:extLst xmlns:a="http://schemas.openxmlformats.org/drawingml/2006/main">
               <a:ext uri="{FF2B5EF4-FFF2-40B4-BE49-F238E27FC236}">
-                <a16:creationId xmlns:a16="http://schemas.microsoft.com/office/drawing/2014/main" id="{39D3743D-7B91-4453-B53E-6B4E1EC3CF80}"/>
+                <a16:creationId xmlns:a16="http://schemas.microsoft.com/office/drawing/2014/main" id="{6C3555D2-2CD5-4E8D-B356-7E8777211F45}"/>
               </a:ext>
             </a:extLst>
           </p:cNvPr>
@@ -3121,7 +3066,7 @@
           <p:cNvPr id="7" name="">
             <a:extLst xmlns:a="http://schemas.openxmlformats.org/drawingml/2006/main">
               <a:ext uri="{FF2B5EF4-FFF2-40B4-BE49-F238E27FC236}">
-                <a16:creationId xmlns:a16="http://schemas.microsoft.com/office/drawing/2014/main" id="{8691EE1E-0E2C-4422-94AE-73AC67432B6F}"/>
+                <a16:creationId xmlns:a16="http://schemas.microsoft.com/office/drawing/2014/main" id="{A13F5C9C-4A2E-4D68-8404-DCB6D2E57500}"/>
               </a:ext>
             </a:extLst>
           </p:cNvPr>
@@ -3151,7 +3096,7 @@
           <p:cNvPr id="8" name="">
             <a:extLst xmlns:a="http://schemas.openxmlformats.org/drawingml/2006/main">
               <a:ext uri="{FF2B5EF4-FFF2-40B4-BE49-F238E27FC236}">
-                <a16:creationId xmlns:a16="http://schemas.microsoft.com/office/drawing/2014/main" id="{616DC23A-A414-453F-BE5F-3FC1B5E5171B}"/>
+                <a16:creationId xmlns:a16="http://schemas.microsoft.com/office/drawing/2014/main" id="{7F1822CB-54DD-4751-A612-B9EAC55139B8}"/>
               </a:ext>
             </a:extLst>
           </p:cNvPr>
@@ -3208,7 +3153,7 @@
           <p:cNvPr id="9" name="">
             <a:extLst xmlns:a="http://schemas.openxmlformats.org/drawingml/2006/main">
               <a:ext uri="{FF2B5EF4-FFF2-40B4-BE49-F238E27FC236}">
-                <a16:creationId xmlns:a16="http://schemas.microsoft.com/office/drawing/2014/main" id="{8EA1CCE5-15DE-436E-B97E-15070859714E}"/>
+                <a16:creationId xmlns:a16="http://schemas.microsoft.com/office/drawing/2014/main" id="{30F496E0-9636-4DEF-919C-F64EA05F7C79}"/>
               </a:ext>
             </a:extLst>
           </p:cNvPr>
@@ -3265,7 +3210,7 @@
           <p:cNvPr id="10" name="">
             <a:extLst xmlns:a="http://schemas.openxmlformats.org/drawingml/2006/main">
               <a:ext uri="{FF2B5EF4-FFF2-40B4-BE49-F238E27FC236}">
-                <a16:creationId xmlns:a16="http://schemas.microsoft.com/office/drawing/2014/main" id="{423FFA03-3BD9-46F9-A796-04C0D39C2A44}"/>
+                <a16:creationId xmlns:a16="http://schemas.microsoft.com/office/drawing/2014/main" id="{163880DA-187E-463C-AFBD-5FA61FCCEA21}"/>
               </a:ext>
             </a:extLst>
           </p:cNvPr>
@@ -3322,7 +3267,7 @@
           <p:cNvPr id="11" name="">
             <a:extLst xmlns:a="http://schemas.openxmlformats.org/drawingml/2006/main">
               <a:ext uri="{FF2B5EF4-FFF2-40B4-BE49-F238E27FC236}">
-                <a16:creationId xmlns:a16="http://schemas.microsoft.com/office/drawing/2014/main" id="{A4DADA6D-F470-4FD1-B501-0D39E750ED4D}"/>
+                <a16:creationId xmlns:a16="http://schemas.microsoft.com/office/drawing/2014/main" id="{E6754861-95B6-43EB-AF41-7C54846FE5B0}"/>
               </a:ext>
             </a:extLst>
           </p:cNvPr>
@@ -3354,7 +3299,7 @@
           <p:cNvPr id="12" name="">
             <a:extLst xmlns:a="http://schemas.openxmlformats.org/drawingml/2006/main">
               <a:ext uri="{FF2B5EF4-FFF2-40B4-BE49-F238E27FC236}">
-                <a16:creationId xmlns:a16="http://schemas.microsoft.com/office/drawing/2014/main" id="{539DAF0B-6C7E-4806-9835-DAE4159BBB91}"/>
+                <a16:creationId xmlns:a16="http://schemas.microsoft.com/office/drawing/2014/main" id="{0EE72A22-885E-407D-A0C1-C24125E0CDC0}"/>
               </a:ext>
             </a:extLst>
           </p:cNvPr>
@@ -3384,7 +3329,7 @@
           <p:cNvPr id="13" name="">
             <a:extLst xmlns:a="http://schemas.openxmlformats.org/drawingml/2006/main">
               <a:ext uri="{FF2B5EF4-FFF2-40B4-BE49-F238E27FC236}">
-                <a16:creationId xmlns:a16="http://schemas.microsoft.com/office/drawing/2014/main" id="{7100852E-AE30-4FCA-96CC-7C3933DC2233}"/>
+                <a16:creationId xmlns:a16="http://schemas.microsoft.com/office/drawing/2014/main" id="{9C2FBA46-4F9C-412E-B2E9-0EA418B37397}"/>
               </a:ext>
             </a:extLst>
           </p:cNvPr>
@@ -3441,7 +3386,7 @@
           <p:cNvPr id="14" name="">
             <a:extLst xmlns:a="http://schemas.openxmlformats.org/drawingml/2006/main">
               <a:ext uri="{FF2B5EF4-FFF2-40B4-BE49-F238E27FC236}">
-                <a16:creationId xmlns:a16="http://schemas.microsoft.com/office/drawing/2014/main" id="{14B8900D-7A6E-4A96-B563-16046ACCE04F}"/>
+                <a16:creationId xmlns:a16="http://schemas.microsoft.com/office/drawing/2014/main" id="{5E2E08B2-58F3-476A-8E59-B7E8336D0C51}"/>
               </a:ext>
             </a:extLst>
           </p:cNvPr>
@@ -3498,7 +3443,7 @@
           <p:cNvPr id="15" name="">
             <a:extLst xmlns:a="http://schemas.openxmlformats.org/drawingml/2006/main">
               <a:ext uri="{FF2B5EF4-FFF2-40B4-BE49-F238E27FC236}">
-                <a16:creationId xmlns:a16="http://schemas.microsoft.com/office/drawing/2014/main" id="{07263879-797B-42B7-A1C1-92BE639236D8}"/>
+                <a16:creationId xmlns:a16="http://schemas.microsoft.com/office/drawing/2014/main" id="{327CAD4F-09EC-42A1-8374-DB627F658A40}"/>
               </a:ext>
             </a:extLst>
           </p:cNvPr>
@@ -3555,7 +3500,7 @@
           <p:cNvPr id="16" name="">
             <a:extLst xmlns:a="http://schemas.openxmlformats.org/drawingml/2006/main">
               <a:ext uri="{FF2B5EF4-FFF2-40B4-BE49-F238E27FC236}">
-                <a16:creationId xmlns:a16="http://schemas.microsoft.com/office/drawing/2014/main" id="{1BD79B45-9111-4B38-B81E-6135E1D1F71B}"/>
+                <a16:creationId xmlns:a16="http://schemas.microsoft.com/office/drawing/2014/main" id="{C74B594B-0591-4D42-8686-AFD760054DAE}"/>
               </a:ext>
             </a:extLst>
           </p:cNvPr>
@@ -3585,7 +3530,7 @@
           <p:cNvPr id="17" name="">
             <a:extLst xmlns:a="http://schemas.openxmlformats.org/drawingml/2006/main">
               <a:ext uri="{FF2B5EF4-FFF2-40B4-BE49-F238E27FC236}">
-                <a16:creationId xmlns:a16="http://schemas.microsoft.com/office/drawing/2014/main" id="{7189A996-EB53-4F8A-B5C0-A48406019E75}"/>
+                <a16:creationId xmlns:a16="http://schemas.microsoft.com/office/drawing/2014/main" id="{5FB8EEDE-8781-4508-A5FE-D90C419D17B6}"/>
               </a:ext>
             </a:extLst>
           </p:cNvPr>
@@ -3642,7 +3587,7 @@
           <p:cNvPr id="18" name="">
             <a:extLst xmlns:a="http://schemas.openxmlformats.org/drawingml/2006/main">
               <a:ext uri="{FF2B5EF4-FFF2-40B4-BE49-F238E27FC236}">
-                <a16:creationId xmlns:a16="http://schemas.microsoft.com/office/drawing/2014/main" id="{EF5882EC-A307-465E-AE43-9CD034ACC125}"/>
+                <a16:creationId xmlns:a16="http://schemas.microsoft.com/office/drawing/2014/main" id="{6DCE87FF-750C-417A-BE63-95B3A855976F}"/>
               </a:ext>
             </a:extLst>
           </p:cNvPr>
@@ -3697,7 +3642,7 @@
     </p:spTree>
     <p:extLst>
       <p:ext uri="{BB962C8B-B14F-4D97-AF65-F5344CB8AC3E}">
-        <p14:creationId xmlns:p14="http://schemas.microsoft.com/office/powerpoint/2010/main" val="1938392944"/>
+        <p14:creationId xmlns:p14="http://schemas.microsoft.com/office/powerpoint/2010/main" val="452115813"/>
       </p:ext>
     </p:extLst>
   </p:cSld>

--- a/retrieval-cops-and-robbers-template.pptx
+++ b/retrieval-cops-and-robbers-template.pptx
@@ -2,13 +2,13 @@
 <file path=ppt/presentation.xml><?xml version="1.0" encoding="utf-8"?>
 <p:presentation xmlns:p="http://schemas.openxmlformats.org/presentationml/2006/main">
   <p:sldMasterIdLst>
-    <p:sldMasterId xmlns:r="http://schemas.openxmlformats.org/officeDocument/2006/relationships" id="2147483648" r:id="R7add7701e8d94d3c"/>
+    <p:sldMasterId xmlns:r="http://schemas.openxmlformats.org/officeDocument/2006/relationships" id="2147483648" r:id="R14f5754873344ce1"/>
   </p:sldMasterIdLst>
   <p:notesMasterIdLst>
-    <p:notesMasterId xmlns:r="http://schemas.openxmlformats.org/officeDocument/2006/relationships" r:id="Rcb334c57399447ea"/>
+    <p:notesMasterId xmlns:r="http://schemas.openxmlformats.org/officeDocument/2006/relationships" r:id="Rb9bd92315af541f5"/>
   </p:notesMasterIdLst>
   <p:sldIdLst>
-    <p:sldId xmlns:r="http://schemas.openxmlformats.org/officeDocument/2006/relationships" id="256" r:id="R1e54f7bc6b684ac8"/>
+    <p:sldId xmlns:r="http://schemas.openxmlformats.org/officeDocument/2006/relationships" id="256" r:id="Rb3f884816fe94f67"/>
   </p:sldIdLst>
   <p:sldSz cx="12192000" cy="6858000"/>
   <p:notesSz cx="6858000" cy="9144000"/>
@@ -445,6 +445,66 @@
               <a:t>Replace bracketed text with your own taught prompts and checked answers. All labels and response areas are editable. Give everyone an independent attempt before revealing answers. Duplicate the slide for answers or another prompt. For cards, print the prompt and answer on opposite sides or fold them to keep answers hidden.</a:t>
             </a:r>
           </a:p>
+          <a:p xmlns:a="http://schemas.openxmlformats.org/drawingml/2006/main">
+            <a:r>
+              <a:t/>
+            </a:r>
+          </a:p>
+          <a:p xmlns:a="http://schemas.openxmlformats.org/drawingml/2006/main">
+            <a:r>
+              <a:t>SOURCE AND ACKNOWLEDGEMENT</a:t>
+            </a:r>
+          </a:p>
+          <a:p xmlns:a="http://schemas.openxmlformats.org/drawingml/2006/main">
+            <a:r>
+              <a:t/>
+            </a:r>
+          </a:p>
+          <a:p xmlns:a="http://schemas.openxmlformats.org/drawingml/2006/main">
+            <a:r>
+              <a:t>Kate Jones — published classroom resource</a:t>
+            </a:r>
+          </a:p>
+          <a:p xmlns:a="http://schemas.openxmlformats.org/drawingml/2006/main">
+            <a:r>
+              <a:t/>
+            </a:r>
+          </a:p>
+          <a:p xmlns:a="http://schemas.openxmlformats.org/drawingml/2006/main">
+            <a:r>
+              <a:t>https://tile.psy.gla.ac.uk/2019/12/03/tile-share-best-practice-retrieval-practice-research-and-resources-for-every-classroom-by-kate-jones/</a:t>
+            </a:r>
+          </a:p>
+          <a:p xmlns:a="http://schemas.openxmlformats.org/drawingml/2006/main">
+            <a:r>
+              <a:t/>
+            </a:r>
+          </a:p>
+          <a:p xmlns:a="http://schemas.openxmlformats.org/drawingml/2006/main">
+            <a:r>
+              <a:t>Jones describes this activity in her retrieval practice resources. This is a TNT classroom adaptation with seated sharing and teacher verification.</a:t>
+            </a:r>
+          </a:p>
+          <a:p xmlns:a="http://schemas.openxmlformats.org/drawingml/2006/main">
+            <a:r>
+              <a:t/>
+            </a:r>
+          </a:p>
+          <a:p xmlns:a="http://schemas.openxmlformats.org/drawingml/2006/main">
+            <a:r>
+              <a:t>Independent classroom adaptation; the source retains its own rights.</a:t>
+            </a:r>
+          </a:p>
+          <a:p xmlns:a="http://schemas.openxmlformats.org/drawingml/2006/main">
+            <a:r>
+              <a:t/>
+            </a:r>
+          </a:p>
+          <a:p xmlns:a="http://schemas.openxmlformats.org/drawingml/2006/main">
+            <a:r>
+              <a:t>Full guide: https://tnt-teaching-tools.github.io/retrieval-toolkit/retrieval-cops-and-robbers.html</a:t>
+            </a:r>
+          </a:p>
         </p:txBody>
       </p:sp>
       <p:sp>
@@ -489,7 +549,7 @@
           <p:cNvPr id="4" name="Accent rule">
             <a:extLst xmlns:a="http://schemas.openxmlformats.org/drawingml/2006/main">
               <a:ext uri="{FF2B5EF4-FFF2-40B4-BE49-F238E27FC236}">
-                <a16:creationId xmlns:a16="http://schemas.microsoft.com/office/drawing/2014/main" id="{CB491F24-A2EC-462D-81FB-CA919F397692}"/>
+                <a16:creationId xmlns:a16="http://schemas.microsoft.com/office/drawing/2014/main" id="{27242F87-905B-4F2B-BE1F-936977E455DD}"/>
               </a:ext>
             </a:extLst>
           </p:cNvPr>
@@ -520,7 +580,7 @@
           <p:cNvPr id="2" name="Title">
             <a:extLst xmlns:a="http://schemas.openxmlformats.org/drawingml/2006/main">
               <a:ext uri="{FF2B5EF4-FFF2-40B4-BE49-F238E27FC236}">
-                <a16:creationId xmlns:a16="http://schemas.microsoft.com/office/drawing/2014/main" id="{FE62712F-CC04-4642-850F-E66B139CFDB9}"/>
+                <a16:creationId xmlns:a16="http://schemas.microsoft.com/office/drawing/2014/main" id="{4BD98E97-4E52-434B-A381-A4273309CA01}"/>
               </a:ext>
             </a:extLst>
           </p:cNvPr>
@@ -561,6 +621,7 @@
                 <a:spcPts val="0"/>
               </a:spcAft>
               <a:buNone/>
+              <a:defRPr/>
             </a:lvl1pPr>
             <a:lvl2pPr marL="0" indent="0">
               <a:lnSpc>
@@ -573,6 +634,7 @@
                 <a:spcPts val="0"/>
               </a:spcAft>
               <a:buNone/>
+              <a:defRPr/>
             </a:lvl2pPr>
             <a:lvl3pPr marL="0" indent="0">
               <a:lnSpc>
@@ -585,6 +647,7 @@
                 <a:spcPts val="0"/>
               </a:spcAft>
               <a:buNone/>
+              <a:defRPr/>
             </a:lvl3pPr>
             <a:lvl4pPr marL="0" indent="0">
               <a:lnSpc>
@@ -597,6 +660,7 @@
                 <a:spcPts val="0"/>
               </a:spcAft>
               <a:buNone/>
+              <a:defRPr/>
             </a:lvl4pPr>
             <a:lvl5pPr marL="0" indent="0">
               <a:lnSpc>
@@ -609,6 +673,7 @@
                 <a:spcPts val="0"/>
               </a:spcAft>
               <a:buNone/>
+              <a:defRPr/>
             </a:lvl5pPr>
             <a:lvl6pPr marL="0" indent="0">
               <a:lnSpc>
@@ -621,6 +686,7 @@
                 <a:spcPts val="0"/>
               </a:spcAft>
               <a:buNone/>
+              <a:defRPr/>
             </a:lvl6pPr>
             <a:lvl7pPr marL="0" indent="0">
               <a:lnSpc>
@@ -633,6 +699,7 @@
                 <a:spcPts val="0"/>
               </a:spcAft>
               <a:buNone/>
+              <a:defRPr/>
             </a:lvl7pPr>
             <a:lvl8pPr marL="0" indent="0">
               <a:lnSpc>
@@ -645,6 +712,7 @@
                 <a:spcPts val="0"/>
               </a:spcAft>
               <a:buNone/>
+              <a:defRPr/>
             </a:lvl8pPr>
             <a:lvl9pPr marL="0" indent="0">
               <a:lnSpc>
@@ -657,6 +725,7 @@
                 <a:spcPts val="0"/>
               </a:spcAft>
               <a:buNone/>
+              <a:defRPr/>
             </a:lvl9pPr>
           </a:lstStyle>
           <a:p xmlns:a="http://schemas.openxmlformats.org/drawingml/2006/main"/>
@@ -667,7 +736,7 @@
           <p:cNvPr id="3" name="Subtitle">
             <a:extLst xmlns:a="http://schemas.openxmlformats.org/drawingml/2006/main">
               <a:ext uri="{FF2B5EF4-FFF2-40B4-BE49-F238E27FC236}">
-                <a16:creationId xmlns:a16="http://schemas.microsoft.com/office/drawing/2014/main" id="{04AD6DDB-D1AF-4467-B2A8-F5F92922BBCD}"/>
+                <a16:creationId xmlns:a16="http://schemas.microsoft.com/office/drawing/2014/main" id="{5E35D7FD-72FE-468E-89F4-FA07C55A5493}"/>
               </a:ext>
             </a:extLst>
           </p:cNvPr>
@@ -708,6 +777,7 @@
                 <a:spcPts val="0"/>
               </a:spcAft>
               <a:buNone/>
+              <a:defRPr/>
             </a:lvl1pPr>
             <a:lvl2pPr marL="0" indent="0">
               <a:lnSpc>
@@ -720,6 +790,7 @@
                 <a:spcPts val="0"/>
               </a:spcAft>
               <a:buNone/>
+              <a:defRPr/>
             </a:lvl2pPr>
             <a:lvl3pPr marL="0" indent="0">
               <a:lnSpc>
@@ -732,6 +803,7 @@
                 <a:spcPts val="0"/>
               </a:spcAft>
               <a:buNone/>
+              <a:defRPr/>
             </a:lvl3pPr>
             <a:lvl4pPr marL="0" indent="0">
               <a:lnSpc>
@@ -744,6 +816,7 @@
                 <a:spcPts val="0"/>
               </a:spcAft>
               <a:buNone/>
+              <a:defRPr/>
             </a:lvl4pPr>
             <a:lvl5pPr marL="0" indent="0">
               <a:lnSpc>
@@ -756,6 +829,7 @@
                 <a:spcPts val="0"/>
               </a:spcAft>
               <a:buNone/>
+              <a:defRPr/>
             </a:lvl5pPr>
             <a:lvl6pPr marL="0" indent="0">
               <a:lnSpc>
@@ -768,6 +842,7 @@
                 <a:spcPts val="0"/>
               </a:spcAft>
               <a:buNone/>
+              <a:defRPr/>
             </a:lvl6pPr>
             <a:lvl7pPr marL="0" indent="0">
               <a:lnSpc>
@@ -780,6 +855,7 @@
                 <a:spcPts val="0"/>
               </a:spcAft>
               <a:buNone/>
+              <a:defRPr/>
             </a:lvl7pPr>
             <a:lvl8pPr marL="0" indent="0">
               <a:lnSpc>
@@ -792,6 +868,7 @@
                 <a:spcPts val="0"/>
               </a:spcAft>
               <a:buNone/>
+              <a:defRPr/>
             </a:lvl8pPr>
             <a:lvl9pPr marL="0" indent="0">
               <a:lnSpc>
@@ -804,6 +881,7 @@
                 <a:spcPts val="0"/>
               </a:spcAft>
               <a:buNone/>
+              <a:defRPr/>
             </a:lvl9pPr>
           </a:lstStyle>
           <a:p xmlns:a="http://schemas.openxmlformats.org/drawingml/2006/main"/>
@@ -831,7 +909,7 @@
           <p:cNvPr id="3" name="Accent rule">
             <a:extLst xmlns:a="http://schemas.openxmlformats.org/drawingml/2006/main">
               <a:ext uri="{FF2B5EF4-FFF2-40B4-BE49-F238E27FC236}">
-                <a16:creationId xmlns:a16="http://schemas.microsoft.com/office/drawing/2014/main" id="{DE5C5AD0-8B7E-402B-BDA2-2F42D8973817}"/>
+                <a16:creationId xmlns:a16="http://schemas.microsoft.com/office/drawing/2014/main" id="{A1F5EC98-B332-4C60-AC92-4C0893B743E9}"/>
               </a:ext>
             </a:extLst>
           </p:cNvPr>
@@ -862,7 +940,7 @@
           <p:cNvPr id="2" name="Section title">
             <a:extLst xmlns:a="http://schemas.openxmlformats.org/drawingml/2006/main">
               <a:ext uri="{FF2B5EF4-FFF2-40B4-BE49-F238E27FC236}">
-                <a16:creationId xmlns:a16="http://schemas.microsoft.com/office/drawing/2014/main" id="{BC51B4C5-C535-41D6-8E1F-36F11EF95945}"/>
+                <a16:creationId xmlns:a16="http://schemas.microsoft.com/office/drawing/2014/main" id="{34E22616-78E8-428B-8FFD-BD12554E48CB}"/>
               </a:ext>
             </a:extLst>
           </p:cNvPr>
@@ -903,6 +981,7 @@
                 <a:spcPts val="0"/>
               </a:spcAft>
               <a:buNone/>
+              <a:defRPr/>
             </a:lvl1pPr>
             <a:lvl2pPr marL="0" indent="0">
               <a:lnSpc>
@@ -915,6 +994,7 @@
                 <a:spcPts val="0"/>
               </a:spcAft>
               <a:buNone/>
+              <a:defRPr/>
             </a:lvl2pPr>
             <a:lvl3pPr marL="0" indent="0">
               <a:lnSpc>
@@ -927,6 +1007,7 @@
                 <a:spcPts val="0"/>
               </a:spcAft>
               <a:buNone/>
+              <a:defRPr/>
             </a:lvl3pPr>
             <a:lvl4pPr marL="0" indent="0">
               <a:lnSpc>
@@ -939,6 +1020,7 @@
                 <a:spcPts val="0"/>
               </a:spcAft>
               <a:buNone/>
+              <a:defRPr/>
             </a:lvl4pPr>
             <a:lvl5pPr marL="0" indent="0">
               <a:lnSpc>
@@ -951,6 +1033,7 @@
                 <a:spcPts val="0"/>
               </a:spcAft>
               <a:buNone/>
+              <a:defRPr/>
             </a:lvl5pPr>
             <a:lvl6pPr marL="0" indent="0">
               <a:lnSpc>
@@ -963,6 +1046,7 @@
                 <a:spcPts val="0"/>
               </a:spcAft>
               <a:buNone/>
+              <a:defRPr/>
             </a:lvl6pPr>
             <a:lvl7pPr marL="0" indent="0">
               <a:lnSpc>
@@ -975,6 +1059,7 @@
                 <a:spcPts val="0"/>
               </a:spcAft>
               <a:buNone/>
+              <a:defRPr/>
             </a:lvl7pPr>
             <a:lvl8pPr marL="0" indent="0">
               <a:lnSpc>
@@ -987,6 +1072,7 @@
                 <a:spcPts val="0"/>
               </a:spcAft>
               <a:buNone/>
+              <a:defRPr/>
             </a:lvl8pPr>
             <a:lvl9pPr marL="0" indent="0">
               <a:lnSpc>
@@ -999,6 +1085,7 @@
                 <a:spcPts val="0"/>
               </a:spcAft>
               <a:buNone/>
+              <a:defRPr/>
             </a:lvl9pPr>
           </a:lstStyle>
           <a:p xmlns:a="http://schemas.openxmlformats.org/drawingml/2006/main"/>
@@ -1026,7 +1113,7 @@
           <p:cNvPr id="4" name="Accent rule">
             <a:extLst xmlns:a="http://schemas.openxmlformats.org/drawingml/2006/main">
               <a:ext uri="{FF2B5EF4-FFF2-40B4-BE49-F238E27FC236}">
-                <a16:creationId xmlns:a16="http://schemas.microsoft.com/office/drawing/2014/main" id="{23E8E1B9-3C0D-4DAA-9B05-FCDCA30373BC}"/>
+                <a16:creationId xmlns:a16="http://schemas.microsoft.com/office/drawing/2014/main" id="{D3B05B45-CA06-4DD7-9837-B653E16E4A33}"/>
               </a:ext>
             </a:extLst>
           </p:cNvPr>
@@ -1057,7 +1144,7 @@
           <p:cNvPr id="2" name="Title">
             <a:extLst xmlns:a="http://schemas.openxmlformats.org/drawingml/2006/main">
               <a:ext uri="{FF2B5EF4-FFF2-40B4-BE49-F238E27FC236}">
-                <a16:creationId xmlns:a16="http://schemas.microsoft.com/office/drawing/2014/main" id="{11E9B894-CF39-4074-9127-F5053B0C87D9}"/>
+                <a16:creationId xmlns:a16="http://schemas.microsoft.com/office/drawing/2014/main" id="{51483976-C61E-4EEF-B502-520E2337A3E2}"/>
               </a:ext>
             </a:extLst>
           </p:cNvPr>
@@ -1098,6 +1185,7 @@
                 <a:spcPts val="0"/>
               </a:spcAft>
               <a:buNone/>
+              <a:defRPr/>
             </a:lvl1pPr>
             <a:lvl2pPr marL="0" indent="0">
               <a:lnSpc>
@@ -1110,6 +1198,7 @@
                 <a:spcPts val="0"/>
               </a:spcAft>
               <a:buNone/>
+              <a:defRPr/>
             </a:lvl2pPr>
             <a:lvl3pPr marL="0" indent="0">
               <a:lnSpc>
@@ -1122,6 +1211,7 @@
                 <a:spcPts val="0"/>
               </a:spcAft>
               <a:buNone/>
+              <a:defRPr/>
             </a:lvl3pPr>
             <a:lvl4pPr marL="0" indent="0">
               <a:lnSpc>
@@ -1134,6 +1224,7 @@
                 <a:spcPts val="0"/>
               </a:spcAft>
               <a:buNone/>
+              <a:defRPr/>
             </a:lvl4pPr>
             <a:lvl5pPr marL="0" indent="0">
               <a:lnSpc>
@@ -1146,6 +1237,7 @@
                 <a:spcPts val="0"/>
               </a:spcAft>
               <a:buNone/>
+              <a:defRPr/>
             </a:lvl5pPr>
             <a:lvl6pPr marL="0" indent="0">
               <a:lnSpc>
@@ -1158,6 +1250,7 @@
                 <a:spcPts val="0"/>
               </a:spcAft>
               <a:buNone/>
+              <a:defRPr/>
             </a:lvl6pPr>
             <a:lvl7pPr marL="0" indent="0">
               <a:lnSpc>
@@ -1170,6 +1263,7 @@
                 <a:spcPts val="0"/>
               </a:spcAft>
               <a:buNone/>
+              <a:defRPr/>
             </a:lvl7pPr>
             <a:lvl8pPr marL="0" indent="0">
               <a:lnSpc>
@@ -1182,6 +1276,7 @@
                 <a:spcPts val="0"/>
               </a:spcAft>
               <a:buNone/>
+              <a:defRPr/>
             </a:lvl8pPr>
             <a:lvl9pPr marL="0" indent="0">
               <a:lnSpc>
@@ -1194,6 +1289,7 @@
                 <a:spcPts val="0"/>
               </a:spcAft>
               <a:buNone/>
+              <a:defRPr/>
             </a:lvl9pPr>
           </a:lstStyle>
           <a:p xmlns:a="http://schemas.openxmlformats.org/drawingml/2006/main"/>
@@ -1204,7 +1300,7 @@
           <p:cNvPr id="3" name="Body">
             <a:extLst xmlns:a="http://schemas.openxmlformats.org/drawingml/2006/main">
               <a:ext uri="{FF2B5EF4-FFF2-40B4-BE49-F238E27FC236}">
-                <a16:creationId xmlns:a16="http://schemas.microsoft.com/office/drawing/2014/main" id="{94ACF7AF-ECCF-45C5-A767-81C4E0969A1C}"/>
+                <a16:creationId xmlns:a16="http://schemas.microsoft.com/office/drawing/2014/main" id="{C8FE5B40-0980-406D-81A3-94B82038F53D}"/>
               </a:ext>
             </a:extLst>
           </p:cNvPr>
@@ -1245,6 +1341,7 @@
                 <a:spcPts val="1200"/>
               </a:spcAft>
               <a:buChar char="•"/>
+              <a:defRPr/>
             </a:lvl1pPr>
             <a:lvl2pPr marL="533400" indent="-228600">
               <a:lnSpc>
@@ -1257,6 +1354,7 @@
                 <a:spcPts val="1200"/>
               </a:spcAft>
               <a:buChar char="•"/>
+              <a:defRPr/>
             </a:lvl2pPr>
             <a:lvl3pPr marL="838200" indent="-228600">
               <a:lnSpc>
@@ -1269,6 +1367,7 @@
                 <a:spcPts val="1200"/>
               </a:spcAft>
               <a:buChar char="•"/>
+              <a:defRPr/>
             </a:lvl3pPr>
             <a:lvl4pPr marL="1143000" indent="-228600">
               <a:lnSpc>
@@ -1281,6 +1380,7 @@
                 <a:spcPts val="1200"/>
               </a:spcAft>
               <a:buChar char="•"/>
+              <a:defRPr/>
             </a:lvl4pPr>
             <a:lvl5pPr marL="1447800" indent="-228600">
               <a:lnSpc>
@@ -1293,6 +1393,7 @@
                 <a:spcPts val="1200"/>
               </a:spcAft>
               <a:buChar char="•"/>
+              <a:defRPr/>
             </a:lvl5pPr>
             <a:lvl6pPr marL="1752600" indent="-228600">
               <a:lnSpc>
@@ -1305,6 +1406,7 @@
                 <a:spcPts val="1200"/>
               </a:spcAft>
               <a:buChar char="•"/>
+              <a:defRPr/>
             </a:lvl6pPr>
             <a:lvl7pPr marL="2057400" indent="-228600">
               <a:lnSpc>
@@ -1317,6 +1419,7 @@
                 <a:spcPts val="1200"/>
               </a:spcAft>
               <a:buChar char="•"/>
+              <a:defRPr/>
             </a:lvl7pPr>
             <a:lvl8pPr marL="2362200" indent="-228600">
               <a:lnSpc>
@@ -1329,6 +1432,7 @@
                 <a:spcPts val="1200"/>
               </a:spcAft>
               <a:buChar char="•"/>
+              <a:defRPr/>
             </a:lvl8pPr>
             <a:lvl9pPr marL="2667000" indent="-228600">
               <a:lnSpc>
@@ -1341,6 +1445,7 @@
                 <a:spcPts val="1200"/>
               </a:spcAft>
               <a:buChar char="•"/>
+              <a:defRPr/>
             </a:lvl9pPr>
           </a:lstStyle>
           <a:p xmlns:a="http://schemas.openxmlformats.org/drawingml/2006/main"/>
@@ -1368,7 +1473,7 @@
           <p:cNvPr id="5" name="Accent rule">
             <a:extLst xmlns:a="http://schemas.openxmlformats.org/drawingml/2006/main">
               <a:ext uri="{FF2B5EF4-FFF2-40B4-BE49-F238E27FC236}">
-                <a16:creationId xmlns:a16="http://schemas.microsoft.com/office/drawing/2014/main" id="{F4553481-8F44-4203-A61C-3C42F40CA5CD}"/>
+                <a16:creationId xmlns:a16="http://schemas.microsoft.com/office/drawing/2014/main" id="{534DB576-6DD9-4643-9F19-1ECA6198119B}"/>
               </a:ext>
             </a:extLst>
           </p:cNvPr>
@@ -1399,7 +1504,7 @@
           <p:cNvPr id="2" name="Title">
             <a:extLst xmlns:a="http://schemas.openxmlformats.org/drawingml/2006/main">
               <a:ext uri="{FF2B5EF4-FFF2-40B4-BE49-F238E27FC236}">
-                <a16:creationId xmlns:a16="http://schemas.microsoft.com/office/drawing/2014/main" id="{D2B8CD16-3A9B-424F-AE01-81725D39084B}"/>
+                <a16:creationId xmlns:a16="http://schemas.microsoft.com/office/drawing/2014/main" id="{8381C995-7CFE-47E1-90C9-D2BFAC9DC3EB}"/>
               </a:ext>
             </a:extLst>
           </p:cNvPr>
@@ -1440,6 +1545,7 @@
                 <a:spcPts val="0"/>
               </a:spcAft>
               <a:buNone/>
+              <a:defRPr/>
             </a:lvl1pPr>
             <a:lvl2pPr marL="0" indent="0">
               <a:lnSpc>
@@ -1452,6 +1558,7 @@
                 <a:spcPts val="0"/>
               </a:spcAft>
               <a:buNone/>
+              <a:defRPr/>
             </a:lvl2pPr>
             <a:lvl3pPr marL="0" indent="0">
               <a:lnSpc>
@@ -1464,6 +1571,7 @@
                 <a:spcPts val="0"/>
               </a:spcAft>
               <a:buNone/>
+              <a:defRPr/>
             </a:lvl3pPr>
             <a:lvl4pPr marL="0" indent="0">
               <a:lnSpc>
@@ -1476,6 +1584,7 @@
                 <a:spcPts val="0"/>
               </a:spcAft>
               <a:buNone/>
+              <a:defRPr/>
             </a:lvl4pPr>
             <a:lvl5pPr marL="0" indent="0">
               <a:lnSpc>
@@ -1488,6 +1597,7 @@
                 <a:spcPts val="0"/>
               </a:spcAft>
               <a:buNone/>
+              <a:defRPr/>
             </a:lvl5pPr>
             <a:lvl6pPr marL="0" indent="0">
               <a:lnSpc>
@@ -1500,6 +1610,7 @@
                 <a:spcPts val="0"/>
               </a:spcAft>
               <a:buNone/>
+              <a:defRPr/>
             </a:lvl6pPr>
             <a:lvl7pPr marL="0" indent="0">
               <a:lnSpc>
@@ -1512,6 +1623,7 @@
                 <a:spcPts val="0"/>
               </a:spcAft>
               <a:buNone/>
+              <a:defRPr/>
             </a:lvl7pPr>
             <a:lvl8pPr marL="0" indent="0">
               <a:lnSpc>
@@ -1524,6 +1636,7 @@
                 <a:spcPts val="0"/>
               </a:spcAft>
               <a:buNone/>
+              <a:defRPr/>
             </a:lvl8pPr>
             <a:lvl9pPr marL="0" indent="0">
               <a:lnSpc>
@@ -1536,6 +1649,7 @@
                 <a:spcPts val="0"/>
               </a:spcAft>
               <a:buNone/>
+              <a:defRPr/>
             </a:lvl9pPr>
           </a:lstStyle>
           <a:p xmlns:a="http://schemas.openxmlformats.org/drawingml/2006/main"/>
@@ -1546,7 +1660,7 @@
           <p:cNvPr id="3" name="Left column">
             <a:extLst xmlns:a="http://schemas.openxmlformats.org/drawingml/2006/main">
               <a:ext uri="{FF2B5EF4-FFF2-40B4-BE49-F238E27FC236}">
-                <a16:creationId xmlns:a16="http://schemas.microsoft.com/office/drawing/2014/main" id="{ADE6855F-60E7-4C90-9326-2553817219DF}"/>
+                <a16:creationId xmlns:a16="http://schemas.microsoft.com/office/drawing/2014/main" id="{C26002D2-F2C0-45B8-9866-4E6D1490E836}"/>
               </a:ext>
             </a:extLst>
           </p:cNvPr>
@@ -1587,6 +1701,7 @@
                 <a:spcPts val="1200"/>
               </a:spcAft>
               <a:buChar char="•"/>
+              <a:defRPr/>
             </a:lvl1pPr>
             <a:lvl2pPr marL="533400" indent="-228600">
               <a:lnSpc>
@@ -1599,6 +1714,7 @@
                 <a:spcPts val="1200"/>
               </a:spcAft>
               <a:buChar char="•"/>
+              <a:defRPr/>
             </a:lvl2pPr>
             <a:lvl3pPr marL="838200" indent="-228600">
               <a:lnSpc>
@@ -1611,6 +1727,7 @@
                 <a:spcPts val="1200"/>
               </a:spcAft>
               <a:buChar char="•"/>
+              <a:defRPr/>
             </a:lvl3pPr>
             <a:lvl4pPr marL="1143000" indent="-228600">
               <a:lnSpc>
@@ -1623,6 +1740,7 @@
                 <a:spcPts val="1200"/>
               </a:spcAft>
               <a:buChar char="•"/>
+              <a:defRPr/>
             </a:lvl4pPr>
             <a:lvl5pPr marL="1447800" indent="-228600">
               <a:lnSpc>
@@ -1635,6 +1753,7 @@
                 <a:spcPts val="1200"/>
               </a:spcAft>
               <a:buChar char="•"/>
+              <a:defRPr/>
             </a:lvl5pPr>
             <a:lvl6pPr marL="1752600" indent="-228600">
               <a:lnSpc>
@@ -1647,6 +1766,7 @@
                 <a:spcPts val="1200"/>
               </a:spcAft>
               <a:buChar char="•"/>
+              <a:defRPr/>
             </a:lvl6pPr>
             <a:lvl7pPr marL="2057400" indent="-228600">
               <a:lnSpc>
@@ -1659,6 +1779,7 @@
                 <a:spcPts val="1200"/>
               </a:spcAft>
               <a:buChar char="•"/>
+              <a:defRPr/>
             </a:lvl7pPr>
             <a:lvl8pPr marL="2362200" indent="-228600">
               <a:lnSpc>
@@ -1671,6 +1792,7 @@
                 <a:spcPts val="1200"/>
               </a:spcAft>
               <a:buChar char="•"/>
+              <a:defRPr/>
             </a:lvl8pPr>
             <a:lvl9pPr marL="2667000" indent="-228600">
               <a:lnSpc>
@@ -1683,6 +1805,7 @@
                 <a:spcPts val="1200"/>
               </a:spcAft>
               <a:buChar char="•"/>
+              <a:defRPr/>
             </a:lvl9pPr>
           </a:lstStyle>
           <a:p xmlns:a="http://schemas.openxmlformats.org/drawingml/2006/main"/>
@@ -1693,7 +1816,7 @@
           <p:cNvPr id="4" name="Right column">
             <a:extLst xmlns:a="http://schemas.openxmlformats.org/drawingml/2006/main">
               <a:ext uri="{FF2B5EF4-FFF2-40B4-BE49-F238E27FC236}">
-                <a16:creationId xmlns:a16="http://schemas.microsoft.com/office/drawing/2014/main" id="{D1368D29-FCF1-4BAE-BC10-3E74FA8FB2B7}"/>
+                <a16:creationId xmlns:a16="http://schemas.microsoft.com/office/drawing/2014/main" id="{78F29CD4-FA8F-4BBD-A170-10D797646F57}"/>
               </a:ext>
             </a:extLst>
           </p:cNvPr>
@@ -1734,6 +1857,7 @@
                 <a:spcPts val="1200"/>
               </a:spcAft>
               <a:buChar char="•"/>
+              <a:defRPr/>
             </a:lvl1pPr>
             <a:lvl2pPr marL="533400" indent="-228600">
               <a:lnSpc>
@@ -1746,6 +1870,7 @@
                 <a:spcPts val="1200"/>
               </a:spcAft>
               <a:buChar char="•"/>
+              <a:defRPr/>
             </a:lvl2pPr>
             <a:lvl3pPr marL="838200" indent="-228600">
               <a:lnSpc>
@@ -1758,6 +1883,7 @@
                 <a:spcPts val="1200"/>
               </a:spcAft>
               <a:buChar char="•"/>
+              <a:defRPr/>
             </a:lvl3pPr>
             <a:lvl4pPr marL="1143000" indent="-228600">
               <a:lnSpc>
@@ -1770,6 +1896,7 @@
                 <a:spcPts val="1200"/>
               </a:spcAft>
               <a:buChar char="•"/>
+              <a:defRPr/>
             </a:lvl4pPr>
             <a:lvl5pPr marL="1447800" indent="-228600">
               <a:lnSpc>
@@ -1782,6 +1909,7 @@
                 <a:spcPts val="1200"/>
               </a:spcAft>
               <a:buChar char="•"/>
+              <a:defRPr/>
             </a:lvl5pPr>
             <a:lvl6pPr marL="1752600" indent="-228600">
               <a:lnSpc>
@@ -1794,6 +1922,7 @@
                 <a:spcPts val="1200"/>
               </a:spcAft>
               <a:buChar char="•"/>
+              <a:defRPr/>
             </a:lvl6pPr>
             <a:lvl7pPr marL="2057400" indent="-228600">
               <a:lnSpc>
@@ -1806,6 +1935,7 @@
                 <a:spcPts val="1200"/>
               </a:spcAft>
               <a:buChar char="•"/>
+              <a:defRPr/>
             </a:lvl7pPr>
             <a:lvl8pPr marL="2362200" indent="-228600">
               <a:lnSpc>
@@ -1818,6 +1948,7 @@
                 <a:spcPts val="1200"/>
               </a:spcAft>
               <a:buChar char="•"/>
+              <a:defRPr/>
             </a:lvl8pPr>
             <a:lvl9pPr marL="2667000" indent="-228600">
               <a:lnSpc>
@@ -1830,6 +1961,7 @@
                 <a:spcPts val="1200"/>
               </a:spcAft>
               <a:buChar char="•"/>
+              <a:defRPr/>
             </a:lvl9pPr>
           </a:lstStyle>
           <a:p xmlns:a="http://schemas.openxmlformats.org/drawingml/2006/main"/>
@@ -1857,7 +1989,7 @@
           <p:cNvPr id="4" name="Accent rule">
             <a:extLst xmlns:a="http://schemas.openxmlformats.org/drawingml/2006/main">
               <a:ext uri="{FF2B5EF4-FFF2-40B4-BE49-F238E27FC236}">
-                <a16:creationId xmlns:a16="http://schemas.microsoft.com/office/drawing/2014/main" id="{729A7CA0-1A25-42CE-A11F-5ACEA1DAB230}"/>
+                <a16:creationId xmlns:a16="http://schemas.microsoft.com/office/drawing/2014/main" id="{9E7F561C-5AE5-41A4-81BC-E9E918ECA8C0}"/>
               </a:ext>
             </a:extLst>
           </p:cNvPr>
@@ -1888,7 +2020,7 @@
           <p:cNvPr id="2" name="Title">
             <a:extLst xmlns:a="http://schemas.openxmlformats.org/drawingml/2006/main">
               <a:ext uri="{FF2B5EF4-FFF2-40B4-BE49-F238E27FC236}">
-                <a16:creationId xmlns:a16="http://schemas.microsoft.com/office/drawing/2014/main" id="{1C3ECC34-45C0-490D-BE0C-F963C7EFE122}"/>
+                <a16:creationId xmlns:a16="http://schemas.microsoft.com/office/drawing/2014/main" id="{54A37B16-7265-48FE-B92D-7845B1049CF6}"/>
               </a:ext>
             </a:extLst>
           </p:cNvPr>
@@ -1929,6 +2061,7 @@
                 <a:spcPts val="0"/>
               </a:spcAft>
               <a:buNone/>
+              <a:defRPr/>
             </a:lvl1pPr>
             <a:lvl2pPr marL="0" indent="0">
               <a:lnSpc>
@@ -1941,6 +2074,7 @@
                 <a:spcPts val="0"/>
               </a:spcAft>
               <a:buNone/>
+              <a:defRPr/>
             </a:lvl2pPr>
             <a:lvl3pPr marL="0" indent="0">
               <a:lnSpc>
@@ -1953,6 +2087,7 @@
                 <a:spcPts val="0"/>
               </a:spcAft>
               <a:buNone/>
+              <a:defRPr/>
             </a:lvl3pPr>
             <a:lvl4pPr marL="0" indent="0">
               <a:lnSpc>
@@ -1965,6 +2100,7 @@
                 <a:spcPts val="0"/>
               </a:spcAft>
               <a:buNone/>
+              <a:defRPr/>
             </a:lvl4pPr>
             <a:lvl5pPr marL="0" indent="0">
               <a:lnSpc>
@@ -1977,6 +2113,7 @@
                 <a:spcPts val="0"/>
               </a:spcAft>
               <a:buNone/>
+              <a:defRPr/>
             </a:lvl5pPr>
             <a:lvl6pPr marL="0" indent="0">
               <a:lnSpc>
@@ -1989,6 +2126,7 @@
                 <a:spcPts val="0"/>
               </a:spcAft>
               <a:buNone/>
+              <a:defRPr/>
             </a:lvl6pPr>
             <a:lvl7pPr marL="0" indent="0">
               <a:lnSpc>
@@ -2001,6 +2139,7 @@
                 <a:spcPts val="0"/>
               </a:spcAft>
               <a:buNone/>
+              <a:defRPr/>
             </a:lvl7pPr>
             <a:lvl8pPr marL="0" indent="0">
               <a:lnSpc>
@@ -2013,6 +2152,7 @@
                 <a:spcPts val="0"/>
               </a:spcAft>
               <a:buNone/>
+              <a:defRPr/>
             </a:lvl8pPr>
             <a:lvl9pPr marL="0" indent="0">
               <a:lnSpc>
@@ -2025,6 +2165,7 @@
                 <a:spcPts val="0"/>
               </a:spcAft>
               <a:buNone/>
+              <a:defRPr/>
             </a:lvl9pPr>
           </a:lstStyle>
           <a:p xmlns:a="http://schemas.openxmlformats.org/drawingml/2006/main"/>
@@ -2035,7 +2176,7 @@
           <p:cNvPr id="3" name="Left column">
             <a:extLst xmlns:a="http://schemas.openxmlformats.org/drawingml/2006/main">
               <a:ext uri="{FF2B5EF4-FFF2-40B4-BE49-F238E27FC236}">
-                <a16:creationId xmlns:a16="http://schemas.microsoft.com/office/drawing/2014/main" id="{197C33C7-9CFC-45D4-9F8E-D3A22D2F6553}"/>
+                <a16:creationId xmlns:a16="http://schemas.microsoft.com/office/drawing/2014/main" id="{B6AC10D3-0834-4999-8F7C-78A7D20DCF89}"/>
               </a:ext>
             </a:extLst>
           </p:cNvPr>
@@ -2076,6 +2217,7 @@
                 <a:spcPts val="1200"/>
               </a:spcAft>
               <a:buChar char="•"/>
+              <a:defRPr/>
             </a:lvl1pPr>
             <a:lvl2pPr marL="533400" indent="-228600">
               <a:lnSpc>
@@ -2088,6 +2230,7 @@
                 <a:spcPts val="1200"/>
               </a:spcAft>
               <a:buChar char="•"/>
+              <a:defRPr/>
             </a:lvl2pPr>
             <a:lvl3pPr marL="838200" indent="-228600">
               <a:lnSpc>
@@ -2100,6 +2243,7 @@
                 <a:spcPts val="1200"/>
               </a:spcAft>
               <a:buChar char="•"/>
+              <a:defRPr/>
             </a:lvl3pPr>
             <a:lvl4pPr marL="1143000" indent="-228600">
               <a:lnSpc>
@@ -2112,6 +2256,7 @@
                 <a:spcPts val="1200"/>
               </a:spcAft>
               <a:buChar char="•"/>
+              <a:defRPr/>
             </a:lvl4pPr>
             <a:lvl5pPr marL="1447800" indent="-228600">
               <a:lnSpc>
@@ -2124,6 +2269,7 @@
                 <a:spcPts val="1200"/>
               </a:spcAft>
               <a:buChar char="•"/>
+              <a:defRPr/>
             </a:lvl5pPr>
             <a:lvl6pPr marL="1752600" indent="-228600">
               <a:lnSpc>
@@ -2136,6 +2282,7 @@
                 <a:spcPts val="1200"/>
               </a:spcAft>
               <a:buChar char="•"/>
+              <a:defRPr/>
             </a:lvl6pPr>
             <a:lvl7pPr marL="2057400" indent="-228600">
               <a:lnSpc>
@@ -2148,6 +2295,7 @@
                 <a:spcPts val="1200"/>
               </a:spcAft>
               <a:buChar char="•"/>
+              <a:defRPr/>
             </a:lvl7pPr>
             <a:lvl8pPr marL="2362200" indent="-228600">
               <a:lnSpc>
@@ -2160,6 +2308,7 @@
                 <a:spcPts val="1200"/>
               </a:spcAft>
               <a:buChar char="•"/>
+              <a:defRPr/>
             </a:lvl8pPr>
             <a:lvl9pPr marL="2667000" indent="-228600">
               <a:lnSpc>
@@ -2172,6 +2321,7 @@
                 <a:spcPts val="1200"/>
               </a:spcAft>
               <a:buChar char="•"/>
+              <a:defRPr/>
             </a:lvl9pPr>
           </a:lstStyle>
           <a:p xmlns:a="http://schemas.openxmlformats.org/drawingml/2006/main"/>
@@ -2220,12 +2370,12 @@
   </p:cSld>
   <p:clrMap bg1="lt1" tx1="dk1" bg2="lt2" tx2="dk2" accent1="accent1" accent2="accent2" accent3="accent3" accent4="accent4" accent5="accent5" accent6="accent6" hlink="hlink" folHlink="folHlink"/>
   <p:sldLayoutIdLst>
-    <p:sldLayoutId xmlns:r="http://schemas.openxmlformats.org/officeDocument/2006/relationships" id="2147483649" r:id="R560071295dfb41e4"/>
-    <p:sldLayoutId xmlns:r="http://schemas.openxmlformats.org/officeDocument/2006/relationships" id="2147483650" r:id="R1fd32a92b90a47a6"/>
-    <p:sldLayoutId xmlns:r="http://schemas.openxmlformats.org/officeDocument/2006/relationships" id="2147483651" r:id="R2154a036785945e5"/>
-    <p:sldLayoutId xmlns:r="http://schemas.openxmlformats.org/officeDocument/2006/relationships" id="2147483652" r:id="R1a25ef83154d4dec"/>
-    <p:sldLayoutId xmlns:r="http://schemas.openxmlformats.org/officeDocument/2006/relationships" id="2147483653" r:id="Rabeecfef74074861"/>
-    <p:sldLayoutId xmlns:r="http://schemas.openxmlformats.org/officeDocument/2006/relationships" id="2147483654" r:id="R6e605c446c74433c"/>
+    <p:sldLayoutId xmlns:r="http://schemas.openxmlformats.org/officeDocument/2006/relationships" id="2147483649" r:id="R9639095a085943d0"/>
+    <p:sldLayoutId xmlns:r="http://schemas.openxmlformats.org/officeDocument/2006/relationships" id="2147483650" r:id="R69a29a1cea274e8c"/>
+    <p:sldLayoutId xmlns:r="http://schemas.openxmlformats.org/officeDocument/2006/relationships" id="2147483651" r:id="R642a8aae1a024a2d"/>
+    <p:sldLayoutId xmlns:r="http://schemas.openxmlformats.org/officeDocument/2006/relationships" id="2147483652" r:id="Ra0036723f58e405b"/>
+    <p:sldLayoutId xmlns:r="http://schemas.openxmlformats.org/officeDocument/2006/relationships" id="2147483653" r:id="R5b6107a127004780"/>
+    <p:sldLayoutId xmlns:r="http://schemas.openxmlformats.org/officeDocument/2006/relationships" id="2147483654" r:id="Rd5facc3893934eb9"/>
   </p:sldLayoutIdLst>
   <p:txStyles>
     <p:titleStyle>
@@ -2776,7 +2926,7 @@
           <p:cNvPr id="19" name="">
             <a:extLst xmlns:a="http://schemas.openxmlformats.org/drawingml/2006/main">
               <a:ext uri="{FF2B5EF4-FFF2-40B4-BE49-F238E27FC236}">
-                <a16:creationId xmlns:a16="http://schemas.microsoft.com/office/drawing/2014/main" id="{15C0D0A2-F5EB-473C-8969-F735B0054634}"/>
+                <a16:creationId xmlns:a16="http://schemas.microsoft.com/office/drawing/2014/main" id="{CDC4B4CC-C5BD-4015-A39B-F1E458E30DE3}"/>
               </a:ext>
             </a:extLst>
           </p:cNvPr>
@@ -2805,6 +2955,7 @@
           <a:lstStyle xmlns:a="http://schemas.openxmlformats.org/drawingml/2006/main"/>
           <a:p xmlns:a="http://schemas.openxmlformats.org/drawingml/2006/main">
             <a:pPr>
+              <a:buNone/>
               <a:defRPr sz="3450" b="1">
                 <a:solidFill>
                   <a:srgbClr val="263C3A"/>
@@ -2833,7 +2984,7 @@
           <p:cNvPr id="2" name="">
             <a:extLst xmlns:a="http://schemas.openxmlformats.org/drawingml/2006/main">
               <a:ext uri="{FF2B5EF4-FFF2-40B4-BE49-F238E27FC236}">
-                <a16:creationId xmlns:a16="http://schemas.microsoft.com/office/drawing/2014/main" id="{61BF7BFF-C671-4976-9D29-BF3FD1B6CA0C}"/>
+                <a16:creationId xmlns:a16="http://schemas.microsoft.com/office/drawing/2014/main" id="{A7E9E724-A5CB-4883-AF30-389C8C467E7C}"/>
               </a:ext>
             </a:extLst>
           </p:cNvPr>
@@ -2862,6 +3013,7 @@
           <a:lstStyle xmlns:a="http://schemas.openxmlformats.org/drawingml/2006/main"/>
           <a:p xmlns:a="http://schemas.openxmlformats.org/drawingml/2006/main">
             <a:pPr>
+              <a:buNone/>
               <a:defRPr sz="2175" b="0">
                 <a:solidFill>
                   <a:srgbClr val="687572"/>
@@ -2890,7 +3042,7 @@
           <p:cNvPr id="3" name="">
             <a:extLst xmlns:a="http://schemas.openxmlformats.org/drawingml/2006/main">
               <a:ext uri="{FF2B5EF4-FFF2-40B4-BE49-F238E27FC236}">
-                <a16:creationId xmlns:a16="http://schemas.microsoft.com/office/drawing/2014/main" id="{BA7D4710-69DD-4A38-8E1D-2D1E37CFE97E}"/>
+                <a16:creationId xmlns:a16="http://schemas.microsoft.com/office/drawing/2014/main" id="{17EA8003-51EF-4FC4-8522-CEB9A903D7B0}"/>
               </a:ext>
             </a:extLst>
           </p:cNvPr>
@@ -2920,7 +3072,7 @@
           <p:cNvPr id="4" name="">
             <a:extLst xmlns:a="http://schemas.openxmlformats.org/drawingml/2006/main">
               <a:ext uri="{FF2B5EF4-FFF2-40B4-BE49-F238E27FC236}">
-                <a16:creationId xmlns:a16="http://schemas.microsoft.com/office/drawing/2014/main" id="{400E24ED-41D8-4E2D-8BC7-CF91F74EA83C}"/>
+                <a16:creationId xmlns:a16="http://schemas.microsoft.com/office/drawing/2014/main" id="{25727240-A969-49F7-B935-9DA53D049C9F}"/>
               </a:ext>
             </a:extLst>
           </p:cNvPr>
@@ -2949,6 +3101,7 @@
           <a:lstStyle xmlns:a="http://schemas.openxmlformats.org/drawingml/2006/main"/>
           <a:p xmlns:a="http://schemas.openxmlformats.org/drawingml/2006/main">
             <a:pPr>
+              <a:buNone/>
               <a:defRPr sz="1575" b="1">
                 <a:solidFill>
                   <a:srgbClr val="263C3A"/>
@@ -2977,7 +3130,7 @@
           <p:cNvPr id="5" name="">
             <a:extLst xmlns:a="http://schemas.openxmlformats.org/drawingml/2006/main">
               <a:ext uri="{FF2B5EF4-FFF2-40B4-BE49-F238E27FC236}">
-                <a16:creationId xmlns:a16="http://schemas.microsoft.com/office/drawing/2014/main" id="{E1953C12-E8A1-4FC4-8D92-EBA40725EB89}"/>
+                <a16:creationId xmlns:a16="http://schemas.microsoft.com/office/drawing/2014/main" id="{419670C9-AED1-4198-9335-545859F5BD01}"/>
               </a:ext>
             </a:extLst>
           </p:cNvPr>
@@ -3006,6 +3159,7 @@
           <a:lstStyle xmlns:a="http://schemas.openxmlformats.org/drawingml/2006/main"/>
           <a:p xmlns:a="http://schemas.openxmlformats.org/drawingml/2006/main">
             <a:pPr>
+              <a:buNone/>
               <a:defRPr sz="1575" b="1">
                 <a:solidFill>
                   <a:srgbClr val="263C3A"/>
@@ -3034,7 +3188,7 @@
           <p:cNvPr id="6" name="">
             <a:extLst xmlns:a="http://schemas.openxmlformats.org/drawingml/2006/main">
               <a:ext uri="{FF2B5EF4-FFF2-40B4-BE49-F238E27FC236}">
-                <a16:creationId xmlns:a16="http://schemas.microsoft.com/office/drawing/2014/main" id="{6C3555D2-2CD5-4E8D-B356-7E8777211F45}"/>
+                <a16:creationId xmlns:a16="http://schemas.microsoft.com/office/drawing/2014/main" id="{C12B61E7-0C83-40B4-9D54-991616B6815E}"/>
               </a:ext>
             </a:extLst>
           </p:cNvPr>
@@ -3066,7 +3220,7 @@
           <p:cNvPr id="7" name="">
             <a:extLst xmlns:a="http://schemas.openxmlformats.org/drawingml/2006/main">
               <a:ext uri="{FF2B5EF4-FFF2-40B4-BE49-F238E27FC236}">
-                <a16:creationId xmlns:a16="http://schemas.microsoft.com/office/drawing/2014/main" id="{A13F5C9C-4A2E-4D68-8404-DCB6D2E57500}"/>
+                <a16:creationId xmlns:a16="http://schemas.microsoft.com/office/drawing/2014/main" id="{18B02E81-B434-4542-ADAA-E2BC82AB18F9}"/>
               </a:ext>
             </a:extLst>
           </p:cNvPr>
@@ -3096,7 +3250,7 @@
           <p:cNvPr id="8" name="">
             <a:extLst xmlns:a="http://schemas.openxmlformats.org/drawingml/2006/main">
               <a:ext uri="{FF2B5EF4-FFF2-40B4-BE49-F238E27FC236}">
-                <a16:creationId xmlns:a16="http://schemas.microsoft.com/office/drawing/2014/main" id="{7F1822CB-54DD-4751-A612-B9EAC55139B8}"/>
+                <a16:creationId xmlns:a16="http://schemas.microsoft.com/office/drawing/2014/main" id="{971DA34A-3EF0-491F-B089-775731844007}"/>
               </a:ext>
             </a:extLst>
           </p:cNvPr>
@@ -3125,6 +3279,7 @@
           <a:lstStyle xmlns:a="http://schemas.openxmlformats.org/drawingml/2006/main"/>
           <a:p xmlns:a="http://schemas.openxmlformats.org/drawingml/2006/main">
             <a:pPr>
+              <a:buNone/>
               <a:defRPr sz="1350" b="1">
                 <a:solidFill>
                   <a:srgbClr val="263C3A"/>
@@ -3153,7 +3308,7 @@
           <p:cNvPr id="9" name="">
             <a:extLst xmlns:a="http://schemas.openxmlformats.org/drawingml/2006/main">
               <a:ext uri="{FF2B5EF4-FFF2-40B4-BE49-F238E27FC236}">
-                <a16:creationId xmlns:a16="http://schemas.microsoft.com/office/drawing/2014/main" id="{30F496E0-9636-4DEF-919C-F64EA05F7C79}"/>
+                <a16:creationId xmlns:a16="http://schemas.microsoft.com/office/drawing/2014/main" id="{810D4ED0-6C0F-446C-9333-314436B93A3D}"/>
               </a:ext>
             </a:extLst>
           </p:cNvPr>
@@ -3182,6 +3337,7 @@
           <a:lstStyle xmlns:a="http://schemas.openxmlformats.org/drawingml/2006/main"/>
           <a:p xmlns:a="http://schemas.openxmlformats.org/drawingml/2006/main">
             <a:pPr>
+              <a:buNone/>
               <a:defRPr sz="1725" b="1">
                 <a:solidFill>
                   <a:srgbClr val="263C3A"/>
@@ -3210,7 +3366,7 @@
           <p:cNvPr id="10" name="">
             <a:extLst xmlns:a="http://schemas.openxmlformats.org/drawingml/2006/main">
               <a:ext uri="{FF2B5EF4-FFF2-40B4-BE49-F238E27FC236}">
-                <a16:creationId xmlns:a16="http://schemas.microsoft.com/office/drawing/2014/main" id="{163880DA-187E-463C-AFBD-5FA61FCCEA21}"/>
+                <a16:creationId xmlns:a16="http://schemas.microsoft.com/office/drawing/2014/main" id="{AA4C2EC3-EA44-4D11-8AED-8A0049BC0A1D}"/>
               </a:ext>
             </a:extLst>
           </p:cNvPr>
@@ -3239,6 +3395,7 @@
           <a:lstStyle xmlns:a="http://schemas.openxmlformats.org/drawingml/2006/main"/>
           <a:p xmlns:a="http://schemas.openxmlformats.org/drawingml/2006/main">
             <a:pPr>
+              <a:buNone/>
               <a:defRPr sz="1950" b="0">
                 <a:solidFill>
                   <a:srgbClr val="687572"/>
@@ -3267,7 +3424,7 @@
           <p:cNvPr id="11" name="">
             <a:extLst xmlns:a="http://schemas.openxmlformats.org/drawingml/2006/main">
               <a:ext uri="{FF2B5EF4-FFF2-40B4-BE49-F238E27FC236}">
-                <a16:creationId xmlns:a16="http://schemas.microsoft.com/office/drawing/2014/main" id="{E6754861-95B6-43EB-AF41-7C54846FE5B0}"/>
+                <a16:creationId xmlns:a16="http://schemas.microsoft.com/office/drawing/2014/main" id="{B187E39C-BD6F-4C9A-862A-E65F34433EE6}"/>
               </a:ext>
             </a:extLst>
           </p:cNvPr>
@@ -3299,7 +3456,7 @@
           <p:cNvPr id="12" name="">
             <a:extLst xmlns:a="http://schemas.openxmlformats.org/drawingml/2006/main">
               <a:ext uri="{FF2B5EF4-FFF2-40B4-BE49-F238E27FC236}">
-                <a16:creationId xmlns:a16="http://schemas.microsoft.com/office/drawing/2014/main" id="{0EE72A22-885E-407D-A0C1-C24125E0CDC0}"/>
+                <a16:creationId xmlns:a16="http://schemas.microsoft.com/office/drawing/2014/main" id="{350EF7B1-4286-4552-9018-DA62C364368B}"/>
               </a:ext>
             </a:extLst>
           </p:cNvPr>
@@ -3329,7 +3486,7 @@
           <p:cNvPr id="13" name="">
             <a:extLst xmlns:a="http://schemas.openxmlformats.org/drawingml/2006/main">
               <a:ext uri="{FF2B5EF4-FFF2-40B4-BE49-F238E27FC236}">
-                <a16:creationId xmlns:a16="http://schemas.microsoft.com/office/drawing/2014/main" id="{9C2FBA46-4F9C-412E-B2E9-0EA418B37397}"/>
+                <a16:creationId xmlns:a16="http://schemas.microsoft.com/office/drawing/2014/main" id="{E095964E-4C0F-4A89-BC4A-4D18EE001C3C}"/>
               </a:ext>
             </a:extLst>
           </p:cNvPr>
@@ -3358,6 +3515,7 @@
           <a:lstStyle xmlns:a="http://schemas.openxmlformats.org/drawingml/2006/main"/>
           <a:p xmlns:a="http://schemas.openxmlformats.org/drawingml/2006/main">
             <a:pPr>
+              <a:buNone/>
               <a:defRPr sz="1350" b="1">
                 <a:solidFill>
                   <a:srgbClr val="263C3A"/>
@@ -3386,7 +3544,7 @@
           <p:cNvPr id="14" name="">
             <a:extLst xmlns:a="http://schemas.openxmlformats.org/drawingml/2006/main">
               <a:ext uri="{FF2B5EF4-FFF2-40B4-BE49-F238E27FC236}">
-                <a16:creationId xmlns:a16="http://schemas.microsoft.com/office/drawing/2014/main" id="{5E2E08B2-58F3-476A-8E59-B7E8336D0C51}"/>
+                <a16:creationId xmlns:a16="http://schemas.microsoft.com/office/drawing/2014/main" id="{D79CAE27-31C3-4781-BDEA-A4B03D3C5651}"/>
               </a:ext>
             </a:extLst>
           </p:cNvPr>
@@ -3415,6 +3573,7 @@
           <a:lstStyle xmlns:a="http://schemas.openxmlformats.org/drawingml/2006/main"/>
           <a:p xmlns:a="http://schemas.openxmlformats.org/drawingml/2006/main">
             <a:pPr>
+              <a:buNone/>
               <a:defRPr sz="1725" b="1">
                 <a:solidFill>
                   <a:srgbClr val="263C3A"/>
@@ -3443,7 +3602,7 @@
           <p:cNvPr id="15" name="">
             <a:extLst xmlns:a="http://schemas.openxmlformats.org/drawingml/2006/main">
               <a:ext uri="{FF2B5EF4-FFF2-40B4-BE49-F238E27FC236}">
-                <a16:creationId xmlns:a16="http://schemas.microsoft.com/office/drawing/2014/main" id="{327CAD4F-09EC-42A1-8374-DB627F658A40}"/>
+                <a16:creationId xmlns:a16="http://schemas.microsoft.com/office/drawing/2014/main" id="{A78E290A-A94C-4325-B609-3A60BA187B34}"/>
               </a:ext>
             </a:extLst>
           </p:cNvPr>
@@ -3472,6 +3631,7 @@
           <a:lstStyle xmlns:a="http://schemas.openxmlformats.org/drawingml/2006/main"/>
           <a:p xmlns:a="http://schemas.openxmlformats.org/drawingml/2006/main">
             <a:pPr>
+              <a:buNone/>
               <a:defRPr sz="1950" b="0">
                 <a:solidFill>
                   <a:srgbClr val="687572"/>
@@ -3500,7 +3660,7 @@
           <p:cNvPr id="16" name="">
             <a:extLst xmlns:a="http://schemas.openxmlformats.org/drawingml/2006/main">
               <a:ext uri="{FF2B5EF4-FFF2-40B4-BE49-F238E27FC236}">
-                <a16:creationId xmlns:a16="http://schemas.microsoft.com/office/drawing/2014/main" id="{C74B594B-0591-4D42-8686-AFD760054DAE}"/>
+                <a16:creationId xmlns:a16="http://schemas.microsoft.com/office/drawing/2014/main" id="{DC94CB9B-8838-46BA-9D58-4FDB8BC13899}"/>
               </a:ext>
             </a:extLst>
           </p:cNvPr>
@@ -3530,7 +3690,7 @@
           <p:cNvPr id="17" name="">
             <a:extLst xmlns:a="http://schemas.openxmlformats.org/drawingml/2006/main">
               <a:ext uri="{FF2B5EF4-FFF2-40B4-BE49-F238E27FC236}">
-                <a16:creationId xmlns:a16="http://schemas.microsoft.com/office/drawing/2014/main" id="{5FB8EEDE-8781-4508-A5FE-D90C419D17B6}"/>
+                <a16:creationId xmlns:a16="http://schemas.microsoft.com/office/drawing/2014/main" id="{9AB36D83-45E9-4DF0-8F35-E840EB1DA50B}"/>
               </a:ext>
             </a:extLst>
           </p:cNvPr>
@@ -3559,6 +3719,7 @@
           <a:lstStyle xmlns:a="http://schemas.openxmlformats.org/drawingml/2006/main"/>
           <a:p xmlns:a="http://schemas.openxmlformats.org/drawingml/2006/main">
             <a:pPr>
+              <a:buNone/>
               <a:defRPr sz="1650" b="0">
                 <a:solidFill>
                   <a:srgbClr val="687572"/>
@@ -3587,7 +3748,7 @@
           <p:cNvPr id="18" name="">
             <a:extLst xmlns:a="http://schemas.openxmlformats.org/drawingml/2006/main">
               <a:ext uri="{FF2B5EF4-FFF2-40B4-BE49-F238E27FC236}">
-                <a16:creationId xmlns:a16="http://schemas.microsoft.com/office/drawing/2014/main" id="{6DCE87FF-750C-417A-BE63-95B3A855976F}"/>
+                <a16:creationId xmlns:a16="http://schemas.microsoft.com/office/drawing/2014/main" id="{C8FAFD3B-A9EE-42B1-8B6D-CE5A0B823C48}"/>
               </a:ext>
             </a:extLst>
           </p:cNvPr>
@@ -3616,6 +3777,7 @@
           <a:lstStyle xmlns:a="http://schemas.openxmlformats.org/drawingml/2006/main"/>
           <a:p xmlns:a="http://schemas.openxmlformats.org/drawingml/2006/main">
             <a:pPr>
+              <a:buNone/>
               <a:defRPr sz="1650" b="0">
                 <a:solidFill>
                   <a:srgbClr val="687572"/>
@@ -3639,10 +3801,79 @@
           </a:p>
         </p:txBody>
       </p:sp>
+      <p:sp>
+        <p:nvSpPr>
+          <p:cNvPr id="20" name="source-credit">
+            <a:extLst xmlns:a="http://schemas.openxmlformats.org/drawingml/2006/main">
+              <a:ext uri="{FF2B5EF4-FFF2-40B4-BE49-F238E27FC236}">
+                <a16:creationId xmlns:a16="http://schemas.microsoft.com/office/drawing/2014/main" id="{5690F3C3-3D74-4EFB-92AD-4544937F1241}"/>
+              </a:ext>
+            </a:extLst>
+          </p:cNvPr>
+          <p:cNvSpPr>
+            <a:spLocks xmlns:a="http://schemas.openxmlformats.org/drawingml/2006/main" noGrp="1"/>
+          </p:cNvSpPr>
+          <p:nvPr/>
+        </p:nvSpPr>
+        <p:spPr>
+          <a:xfrm xmlns:a="http://schemas.openxmlformats.org/drawingml/2006/main">
+            <a:off x="609600" y="6591300"/>
+            <a:ext cx="10972800" cy="190500"/>
+          </a:xfrm>
+          <a:prstGeom xmlns:a="http://schemas.openxmlformats.org/drawingml/2006/main" prst="rect">
+            <a:avLst/>
+          </a:prstGeom>
+          <a:noFill xmlns:a="http://schemas.openxmlformats.org/drawingml/2006/main"/>
+          <a:ln xmlns:a="http://schemas.openxmlformats.org/drawingml/2006/main" w="0">
+            <a:noFill/>
+          </a:ln>
+        </p:spPr>
+        <p:txBody>
+          <a:bodyPr xmlns:a="http://schemas.openxmlformats.org/drawingml/2006/main" wrap="none" lIns="0" tIns="0" rIns="0" bIns="0" anchor="t">
+            <a:noAutofit/>
+          </a:bodyPr>
+          <a:lstStyle xmlns:a="http://schemas.openxmlformats.org/drawingml/2006/main"/>
+          <a:p xmlns:a="http://schemas.openxmlformats.org/drawingml/2006/main">
+            <a:pPr>
+              <a:defRPr sz="900">
+                <a:solidFill>
+                  <a:srgbClr val="687572"/>
+                </a:solidFill>
+                <a:latin typeface="DejaVu Sans"/>
+                <a:ea typeface="DejaVu Sans"/>
+                <a:cs typeface="DejaVu Sans"/>
+              </a:defRPr>
+            </a:pPr>
+            <a:r>
+              <a:rPr sz="900">
+                <a:solidFill>
+                  <a:srgbClr val="687572"/>
+                </a:solidFill>
+                <a:latin typeface="DejaVu Sans"/>
+                <a:ea typeface="DejaVu Sans"/>
+                <a:cs typeface="DejaVu Sans"/>
+              </a:rPr>
+              <a:t>Source: </a:t>
+            </a:r>
+            <a:r>
+              <a:rPr sz="900">
+                <a:solidFill>
+                  <a:srgbClr val="687572"/>
+                </a:solidFill>
+                <a:latin typeface="DejaVu Sans"/>
+                <a:ea typeface="DejaVu Sans"/>
+                <a:cs typeface="DejaVu Sans"/>
+                <a:hlinkClick xmlns:r="http://schemas.openxmlformats.org/officeDocument/2006/relationships" r:id="R09ee9f49b25d48c1"/>
+              </a:rPr>
+              <a:t>Kate Jones — published classroom resource — original guidance</a:t>
+            </a:r>
+          </a:p>
+        </p:txBody>
+      </p:sp>
     </p:spTree>
     <p:extLst>
       <p:ext uri="{BB962C8B-B14F-4D97-AF65-F5344CB8AC3E}">
-        <p14:creationId xmlns:p14="http://schemas.microsoft.com/office/powerpoint/2010/main" val="452115813"/>
+        <p14:creationId xmlns:p14="http://schemas.microsoft.com/office/powerpoint/2010/main" val="691838274"/>
       </p:ext>
     </p:extLst>
   </p:cSld>
